--- a/docs/Slide17_not_performed.pptx
+++ b/docs/Slide17_not_performed.pptx
@@ -1684,7 +1684,7 @@
                 <a:ea typeface="Arial"/>
                 <a:cs typeface="Arial"/>
               </a:rPr>
-              <a:t> was not attempted; the figure shows what such a screen looks like.</a:t>
+              <a:t> was not attempted; every number in this deck is bulk, not interfacial.</a:t>
             </a:r>
           </a:p>
         </p:txBody>
